--- a/reports/2026-10-09/YouTube_AI趨勢研究雷達_2026-10-09_簡報.pptx
+++ b/reports/2026-10-09/YouTube_AI趨勢研究雷達_2026-10-09_簡報.pptx
@@ -3257,27 +3257,27 @@
           <a:lstStyle/>
           <a:p>
             <a:r>
-              <a:t>1. 【新刊】「AIに9割任せる株式投資」を検証！ChatGPT・Claudeは投資に使えるのか？｜35,913</a:t>
-            </a:r>
-          </a:p>
-          <a:p>
-            <a:r>
-              <a:t>2. 【絶対やるな】AIで作った3Dモデルを副業販売するときの落とし穴！企業に負けない個人事業の戦略を徹底解説！ #｜16,016</a:t>
-            </a:r>
-          </a:p>
-          <a:p>
-            <a:r>
-              <a:t>3. 5 Boring Claude AI Side Hustles That Pay Better Than a ｜15,329</a:t>
-            </a:r>
-          </a:p>
-          <a:p>
-            <a:r>
-              <a:t>4. 鴻海下一張王牌是機器人？AI伺服器營收狂飆　德州廠導入自動化「機器人反過來造AI」｜關我什麼事｜94要賺錢｜13,294</a:t>
-            </a:r>
-          </a:p>
-          <a:p>
-            <a:r>
-              <a:t>5. Can Google still catch up? Argon is entering the chat #｜9,906</a:t>
+              <a:t>1. 【新刊】「AIに9割任せる株式投資」を検証！ChatGPT・Claudeは投資に使えるのか？｜36,258</a:t>
+            </a:r>
+          </a:p>
+          <a:p>
+            <a:r>
+              <a:t>2. 【絶対やるな】AIで作った3Dモデルを副業販売するときの落とし穴！企業に負けない個人事業の戦略を徹底解説！ #｜16,127</a:t>
+            </a:r>
+          </a:p>
+          <a:p>
+            <a:r>
+              <a:t>3. 5 Boring Claude AI Side Hustles That Pay Better Than a ｜15,499</a:t>
+            </a:r>
+          </a:p>
+          <a:p>
+            <a:r>
+              <a:t>4. 鴻海下一張王牌是機器人？AI伺服器營收狂飆　德州廠導入自動化「機器人反過來造AI」｜關我什麼事｜94要賺錢｜13,559</a:t>
+            </a:r>
+          </a:p>
+          <a:p>
+            <a:r>
+              <a:t>5. Can Google still catch up? Argon is entering the chat #｜10,213</a:t>
             </a:r>
           </a:p>
           <a:p>
@@ -3287,7 +3287,7 @@
           </a:p>
           <a:p>
             <a:r>
-              <a:t>7. 【レベチ】やっぱりGPT6-AstraよりClaude Opus5.5が最強でした。Astraとの比較も公開【｜6,067</a:t>
+              <a:t>7. 【レベチ】やっぱりGPT6-AstraよりClaude Opus5.5が最強でした。Astraとの比較も公開【｜6,102</a:t>
             </a:r>
           </a:p>
         </p:txBody>

--- a/reports/2026-10-09/YouTube_AI趨勢研究雷達_2026-10-09_簡報.pptx
+++ b/reports/2026-10-09/YouTube_AI趨勢研究雷達_2026-10-09_簡報.pptx
@@ -3257,27 +3257,27 @@
           <a:lstStyle/>
           <a:p>
             <a:r>
-              <a:t>1. 【新刊】「AIに9割任せる株式投資」を検証！ChatGPT・Claudeは投資に使えるのか？｜36,258</a:t>
-            </a:r>
-          </a:p>
-          <a:p>
-            <a:r>
-              <a:t>2. 【絶対やるな】AIで作った3Dモデルを副業販売するときの落とし穴！企業に負けない個人事業の戦略を徹底解説！ #｜16,127</a:t>
-            </a:r>
-          </a:p>
-          <a:p>
-            <a:r>
-              <a:t>3. 5 Boring Claude AI Side Hustles That Pay Better Than a ｜15,499</a:t>
-            </a:r>
-          </a:p>
-          <a:p>
-            <a:r>
-              <a:t>4. 鴻海下一張王牌是機器人？AI伺服器營收狂飆　德州廠導入自動化「機器人反過來造AI」｜關我什麼事｜94要賺錢｜13,559</a:t>
-            </a:r>
-          </a:p>
-          <a:p>
-            <a:r>
-              <a:t>5. Can Google still catch up? Argon is entering the chat #｜10,213</a:t>
+              <a:t>1. 【新刊】「AIに9割任せる株式投資」を検証！ChatGPT・Claudeは投資に使えるのか？｜36,276</a:t>
+            </a:r>
+          </a:p>
+          <a:p>
+            <a:r>
+              <a:t>2. 【絶対やるな】AIで作った3Dモデルを副業販売するときの落とし穴！企業に負けない個人事業の戦略を徹底解説！ #｜16,130</a:t>
+            </a:r>
+          </a:p>
+          <a:p>
+            <a:r>
+              <a:t>3. 5 Boring Claude AI Side Hustles That Pay Better Than a ｜15,506</a:t>
+            </a:r>
+          </a:p>
+          <a:p>
+            <a:r>
+              <a:t>4. 鴻海下一張王牌是機器人？AI伺服器營收狂飆　德州廠導入自動化「機器人反過來造AI」｜關我什麼事｜94要賺錢｜13,581</a:t>
+            </a:r>
+          </a:p>
+          <a:p>
+            <a:r>
+              <a:t>5. Can Google still catch up? Argon is entering the chat #｜10,224</a:t>
             </a:r>
           </a:p>
           <a:p>
